--- a/docs/marketing/Turas demo companion.pptx
+++ b/docs/marketing/Turas demo companion.pptx
@@ -11,7 +11,7 @@
     <p:sldId id="358" r:id="rId2"/>
     <p:sldId id="257" r:id="rId3"/>
     <p:sldId id="258" r:id="rId4"/>
-    <p:sldId id="398" r:id="rId5"/>
+    <p:sldId id="412" r:id="rId5"/>
     <p:sldId id="397" r:id="rId6"/>
     <p:sldId id="260" r:id="rId7"/>
     <p:sldId id="378" r:id="rId8"/>
@@ -498,6 +498,13 @@
           </p:nvPr>
         </p:nvSpPr>
         <p:spPr/>
+        <p:txBody>
+          <a:bodyPr/>
+          <a:lstStyle/>
+          <a:p>
+            <a:endParaRPr lang="en-US" dirty="0"/>
+          </a:p>
+        </p:txBody>
       </p:sp>
       <p:sp>
         <p:nvSpPr>
@@ -537,7 +544,7 @@
               <a:rPr lang="en-US"/>
               <a:t>2</a:t>
             </a:fld>
-            <a:endParaRPr lang="en-US"/>
+            <a:endParaRPr lang="en-US" dirty="0"/>
           </a:p>
         </p:txBody>
       </p:sp>
@@ -582,6 +589,13 @@
           </p:nvPr>
         </p:nvSpPr>
         <p:spPr/>
+        <p:txBody>
+          <a:bodyPr/>
+          <a:lstStyle/>
+          <a:p>
+            <a:endParaRPr lang="en-US" dirty="0"/>
+          </a:p>
+        </p:txBody>
       </p:sp>
       <p:sp>
         <p:nvSpPr>
@@ -621,7 +635,7 @@
               <a:rPr lang="en-US"/>
               <a:t>3</a:t>
             </a:fld>
-            <a:endParaRPr lang="en-US"/>
+            <a:endParaRPr lang="en-US" dirty="0"/>
           </a:p>
         </p:txBody>
       </p:sp>
@@ -678,6 +692,13 @@
           </p:nvPr>
         </p:nvSpPr>
         <p:spPr/>
+        <p:txBody>
+          <a:bodyPr/>
+          <a:lstStyle/>
+          <a:p>
+            <a:endParaRPr lang="en-US" dirty="0"/>
+          </a:p>
+        </p:txBody>
       </p:sp>
       <p:sp>
         <p:nvSpPr>
@@ -729,7 +750,7 @@
               <a:rPr lang="en-US"/>
               <a:t>4</a:t>
             </a:fld>
-            <a:endParaRPr lang="en-US"/>
+            <a:endParaRPr lang="en-US" dirty="0"/>
           </a:p>
         </p:txBody>
       </p:sp>
@@ -774,6 +795,13 @@
           </p:nvPr>
         </p:nvSpPr>
         <p:spPr/>
+        <p:txBody>
+          <a:bodyPr/>
+          <a:lstStyle/>
+          <a:p>
+            <a:endParaRPr lang="en-US" dirty="0"/>
+          </a:p>
+        </p:txBody>
       </p:sp>
       <p:sp>
         <p:nvSpPr>
@@ -813,7 +841,7 @@
               <a:rPr lang="en-US"/>
               <a:t>5</a:t>
             </a:fld>
-            <a:endParaRPr lang="en-US"/>
+            <a:endParaRPr lang="en-US" dirty="0"/>
           </a:p>
         </p:txBody>
       </p:sp>
@@ -858,6 +886,13 @@
           </p:nvPr>
         </p:nvSpPr>
         <p:spPr/>
+        <p:txBody>
+          <a:bodyPr/>
+          <a:lstStyle/>
+          <a:p>
+            <a:endParaRPr lang="en-US" dirty="0"/>
+          </a:p>
+        </p:txBody>
       </p:sp>
       <p:sp>
         <p:nvSpPr>
@@ -897,7 +932,7 @@
               <a:rPr lang="en-US"/>
               <a:t>6</a:t>
             </a:fld>
-            <a:endParaRPr lang="en-US"/>
+            <a:endParaRPr lang="en-US" dirty="0"/>
           </a:p>
         </p:txBody>
       </p:sp>
@@ -4454,7 +4489,7 @@
           <a:bodyPr/>
           <a:lstStyle/>
           <a:p>
-            <a:endParaRPr lang="en-US" sz="2400"/>
+            <a:endParaRPr lang="en-US" sz="2400" dirty="0"/>
           </a:p>
         </p:txBody>
       </p:sp>
@@ -4561,7 +4596,7 @@
           <a:bodyPr/>
           <a:lstStyle/>
           <a:p>
-            <a:endParaRPr lang="en-US" sz="2400"/>
+            <a:endParaRPr lang="en-US" sz="2400" dirty="0"/>
           </a:p>
         </p:txBody>
       </p:sp>
@@ -4588,7 +4623,7 @@
           <a:bodyPr/>
           <a:lstStyle/>
           <a:p>
-            <a:endParaRPr lang="en-US" sz="2400"/>
+            <a:endParaRPr lang="en-US" sz="2400" dirty="0"/>
           </a:p>
         </p:txBody>
       </p:sp>
@@ -4615,7 +4650,7 @@
           <a:bodyPr/>
           <a:lstStyle/>
           <a:p>
-            <a:endParaRPr lang="en-US" sz="2400"/>
+            <a:endParaRPr lang="en-US" sz="2400" dirty="0"/>
           </a:p>
         </p:txBody>
       </p:sp>
@@ -4763,7 +4798,7 @@
           <a:bodyPr/>
           <a:lstStyle/>
           <a:p>
-            <a:endParaRPr lang="en-US" sz="2400"/>
+            <a:endParaRPr lang="en-US" sz="2400" dirty="0"/>
           </a:p>
         </p:txBody>
       </p:sp>
@@ -4790,7 +4825,7 @@
           <a:bodyPr/>
           <a:lstStyle/>
           <a:p>
-            <a:endParaRPr lang="en-US" sz="2400"/>
+            <a:endParaRPr lang="en-US" sz="2400" dirty="0"/>
           </a:p>
         </p:txBody>
       </p:sp>
@@ -4817,7 +4852,7 @@
           <a:bodyPr/>
           <a:lstStyle/>
           <a:p>
-            <a:endParaRPr lang="en-US" sz="2400"/>
+            <a:endParaRPr lang="en-US" sz="2400" dirty="0"/>
           </a:p>
         </p:txBody>
       </p:sp>
@@ -4965,7 +5000,7 @@
           <a:bodyPr/>
           <a:lstStyle/>
           <a:p>
-            <a:endParaRPr lang="en-US" sz="2400"/>
+            <a:endParaRPr lang="en-US" sz="2400" dirty="0"/>
           </a:p>
         </p:txBody>
       </p:sp>
@@ -4992,7 +5027,7 @@
           <a:bodyPr/>
           <a:lstStyle/>
           <a:p>
-            <a:endParaRPr lang="en-US" sz="2400"/>
+            <a:endParaRPr lang="en-US" sz="2400" dirty="0"/>
           </a:p>
         </p:txBody>
       </p:sp>
@@ -5019,7 +5054,7 @@
           <a:bodyPr/>
           <a:lstStyle/>
           <a:p>
-            <a:endParaRPr lang="en-US" sz="2400"/>
+            <a:endParaRPr lang="en-US" sz="2400" dirty="0"/>
           </a:p>
         </p:txBody>
       </p:sp>
@@ -5131,7 +5166,7 @@
                 <a:ea typeface="Calibri" pitchFamily="34" charset="-122"/>
                 <a:cs typeface="Calibri" pitchFamily="34" charset="-120"/>
               </a:rPr>
-              <a:t>Most research ends up as a presentation filed on a shared drive. The data stops working.</a:t>
+              <a:t>Most research ends up as a presentation filed on a shared drive. The data stops working for you.</a:t>
             </a:r>
             <a:endParaRPr lang="en-US" sz="1533" dirty="0"/>
           </a:p>
@@ -5196,7 +5231,7 @@
           <a:bodyPr/>
           <a:lstStyle/>
           <a:p>
-            <a:endParaRPr lang="en-US" sz="2400"/>
+            <a:endParaRPr lang="en-US" sz="2400" dirty="0"/>
           </a:p>
         </p:txBody>
       </p:sp>
@@ -5223,7 +5258,7 @@
           <a:bodyPr/>
           <a:lstStyle/>
           <a:p>
-            <a:endParaRPr lang="en-US" sz="2400"/>
+            <a:endParaRPr lang="en-US" sz="2400" dirty="0"/>
           </a:p>
         </p:txBody>
       </p:sp>
@@ -5275,7 +5310,7 @@
           <a:bodyPr/>
           <a:lstStyle/>
           <a:p>
-            <a:endParaRPr lang="en-US" sz="2400"/>
+            <a:endParaRPr lang="en-US" sz="2400" dirty="0"/>
           </a:p>
         </p:txBody>
       </p:sp>
@@ -5382,7 +5417,7 @@
           <a:bodyPr/>
           <a:lstStyle/>
           <a:p>
-            <a:endParaRPr lang="en-US" sz="2400"/>
+            <a:endParaRPr lang="en-US" sz="2400" dirty="0"/>
           </a:p>
         </p:txBody>
       </p:sp>
@@ -5409,7 +5444,7 @@
           <a:bodyPr/>
           <a:lstStyle/>
           <a:p>
-            <a:endParaRPr lang="en-US" sz="2400"/>
+            <a:endParaRPr lang="en-US" sz="2400" dirty="0"/>
           </a:p>
         </p:txBody>
       </p:sp>
@@ -5520,7 +5555,7 @@
           <a:bodyPr/>
           <a:lstStyle/>
           <a:p>
-            <a:endParaRPr lang="en-US" sz="2400"/>
+            <a:endParaRPr lang="en-US" sz="2400" dirty="0"/>
           </a:p>
         </p:txBody>
       </p:sp>
@@ -5547,7 +5582,7 @@
           <a:bodyPr/>
           <a:lstStyle/>
           <a:p>
-            <a:endParaRPr lang="en-US" sz="2400"/>
+            <a:endParaRPr lang="en-US" sz="2400" dirty="0"/>
           </a:p>
         </p:txBody>
       </p:sp>
@@ -5581,7 +5616,7 @@
                 <a:ea typeface="Calibri" pitchFamily="34" charset="-122"/>
                 <a:cs typeface="Calibri" pitchFamily="34" charset="-120"/>
               </a:rPr>
-              <a:t>Your Data, Your Hardware</a:t>
+              <a:t>Fully Managed, Fully Secure</a:t>
             </a:r>
             <a:endParaRPr lang="en-US" sz="1733" dirty="0"/>
           </a:p>
@@ -5622,7 +5657,7 @@
                 <a:ea typeface="Calibri" pitchFamily="34" charset="-122"/>
                 <a:cs typeface="Calibri" pitchFamily="34" charset="-120"/>
               </a:rPr>
-              <a:t>Analysed entirely on our own systems. No third-party platform touches your data. The delivered report is immutable.</a:t>
+              <a:t>You send us the data. We handle all preparation, analysis and delivery on our own systems. No third-party platform touches your data. The delivered report is immutable.</a:t>
             </a:r>
             <a:endParaRPr lang="en-US" sz="1400" dirty="0"/>
           </a:p>
@@ -5658,7 +5693,7 @@
           <a:bodyPr/>
           <a:lstStyle/>
           <a:p>
-            <a:endParaRPr lang="en-US" sz="2400"/>
+            <a:endParaRPr lang="en-US" sz="2400" dirty="0"/>
           </a:p>
         </p:txBody>
       </p:sp>
@@ -5685,7 +5720,7 @@
           <a:bodyPr/>
           <a:lstStyle/>
           <a:p>
-            <a:endParaRPr lang="en-US" sz="2400"/>
+            <a:endParaRPr lang="en-US" sz="2400" dirty="0"/>
           </a:p>
         </p:txBody>
       </p:sp>
@@ -5719,7 +5754,7 @@
                 <a:ea typeface="Calibri" pitchFamily="34" charset="-122"/>
                 <a:cs typeface="Calibri" pitchFamily="34" charset="-120"/>
               </a:rPr>
-              <a:t>SAMRA Accredited</a:t>
+              <a:t>SAMRA Members</a:t>
             </a:r>
             <a:endParaRPr lang="en-US" sz="1733" dirty="0"/>
           </a:p>
@@ -5760,7 +5795,7 @@
                 <a:ea typeface="Calibri" pitchFamily="34" charset="-122"/>
                 <a:cs typeface="Calibri" pitchFamily="34" charset="-120"/>
               </a:rPr>
-              <a:t>30+ years of quantitative market research. The Research LampPost is a SAMRA organisational member.</a:t>
+              <a:t>Duncan Brett is a SAMRA Accredited Researcher with 30+ years quantitative research experience and we're here for you from data preparation through to interpretation.</a:t>
             </a:r>
             <a:endParaRPr lang="en-US" sz="1400" dirty="0"/>
           </a:p>
@@ -5796,7 +5831,7 @@
           <a:bodyPr/>
           <a:lstStyle/>
           <a:p>
-            <a:endParaRPr lang="en-US" sz="2400"/>
+            <a:endParaRPr lang="en-US" sz="2400" dirty="0"/>
           </a:p>
         </p:txBody>
       </p:sp>
@@ -5823,7 +5858,7 @@
           <a:bodyPr/>
           <a:lstStyle/>
           <a:p>
-            <a:endParaRPr lang="en-US" sz="2400"/>
+            <a:endParaRPr lang="en-US" sz="2400" dirty="0"/>
           </a:p>
         </p:txBody>
       </p:sp>
@@ -5898,7 +5933,7 @@
                 <a:ea typeface="Calibri" pitchFamily="34" charset="-122"/>
                 <a:cs typeface="Calibri" pitchFamily="34" charset="-120"/>
               </a:rPr>
-              <a:t>Pay per project. No licences, no installations, no lock-in. Works with any survey dataset.</a:t>
+              <a:t>Pay per project. No software to learn, no licences, no installations. Send us a dataset and we deliver an interactive report. </a:t>
             </a:r>
             <a:endParaRPr lang="en-US" sz="1400" dirty="0"/>
           </a:p>
@@ -5927,7 +5962,7 @@
           <a:bodyPr/>
           <a:lstStyle/>
           <a:p>
-            <a:endParaRPr lang="en-US" sz="2400"/>
+            <a:endParaRPr lang="en-US" sz="2400" dirty="0"/>
           </a:p>
         </p:txBody>
       </p:sp>
@@ -5954,7 +5989,7 @@
           <a:bodyPr/>
           <a:lstStyle/>
           <a:p>
-            <a:endParaRPr lang="en-US" sz="2400"/>
+            <a:endParaRPr lang="en-US" sz="2400" dirty="0"/>
           </a:p>
         </p:txBody>
       </p:sp>
@@ -5991,6 +6026,1043 @@
       </p:grpSpPr>
       <p:sp>
         <p:nvSpPr>
+          <p:cNvPr id="3" name="Rounded Rectangle 2">
+            <a:extLst>
+              <a:ext uri="{FF2B5EF4-FFF2-40B4-BE49-F238E27FC236}">
+                <a16:creationId xmlns:a16="http://schemas.microsoft.com/office/drawing/2014/main" id="{8C4D6DFD-186B-9842-B079-BD89D0C361DD}"/>
+              </a:ext>
+            </a:extLst>
+          </p:cNvPr>
+          <p:cNvSpPr/>
+          <p:nvPr/>
+        </p:nvSpPr>
+        <p:spPr>
+          <a:xfrm>
+            <a:off x="4914900" y="2184400"/>
+            <a:ext cx="6413500" cy="2286000"/>
+          </a:xfrm>
+          <a:prstGeom prst="roundRect">
+            <a:avLst/>
+          </a:prstGeom>
+          <a:solidFill>
+            <a:srgbClr val="FDF6E8"/>
+          </a:solidFill>
+          <a:ln w="19050" cap="flat" cmpd="sng" algn="ctr">
+            <a:noFill/>
+            <a:prstDash val="solid"/>
+            <a:miter lim="800000"/>
+          </a:ln>
+        </p:spPr>
+        <p:style>
+          <a:lnRef idx="2">
+            <a:schemeClr val="accent1">
+              <a:shade val="15000"/>
+            </a:schemeClr>
+          </a:lnRef>
+          <a:fillRef idx="1">
+            <a:schemeClr val="accent1"/>
+          </a:fillRef>
+          <a:effectRef idx="0">
+            <a:schemeClr val="accent1"/>
+          </a:effectRef>
+          <a:fontRef idx="minor">
+            <a:schemeClr val="lt1"/>
+          </a:fontRef>
+        </p:style>
+        <p:txBody>
+          <a:bodyPr vertOverflow="clip" horzOverflow="clip" rtlCol="0" anchor="t"/>
+          <a:lstStyle/>
+          <a:p>
+            <a:pPr algn="l"/>
+            <a:endParaRPr lang="en-US" dirty="0"/>
+          </a:p>
+        </p:txBody>
+      </p:sp>
+      <p:sp>
+        <p:nvSpPr>
+          <p:cNvPr id="2" name="Rounded Rectangle 1">
+            <a:extLst>
+              <a:ext uri="{FF2B5EF4-FFF2-40B4-BE49-F238E27FC236}">
+                <a16:creationId xmlns:a16="http://schemas.microsoft.com/office/drawing/2014/main" id="{3F99FD8F-E8D9-B746-BB35-7E148A1D75CE}"/>
+              </a:ext>
+            </a:extLst>
+          </p:cNvPr>
+          <p:cNvSpPr/>
+          <p:nvPr/>
+        </p:nvSpPr>
+        <p:spPr>
+          <a:xfrm>
+            <a:off x="914400" y="2184400"/>
+            <a:ext cx="3924300" cy="2286000"/>
+          </a:xfrm>
+          <a:prstGeom prst="roundRect">
+            <a:avLst/>
+          </a:prstGeom>
+          <a:solidFill>
+            <a:srgbClr val="F0F1F5"/>
+          </a:solidFill>
+          <a:ln w="19050" cap="flat" cmpd="sng" algn="ctr">
+            <a:noFill/>
+            <a:prstDash val="solid"/>
+            <a:miter lim="800000"/>
+          </a:ln>
+        </p:spPr>
+        <p:style>
+          <a:lnRef idx="2">
+            <a:schemeClr val="accent1">
+              <a:shade val="15000"/>
+            </a:schemeClr>
+          </a:lnRef>
+          <a:fillRef idx="1">
+            <a:schemeClr val="accent1"/>
+          </a:fillRef>
+          <a:effectRef idx="0">
+            <a:schemeClr val="accent1"/>
+          </a:effectRef>
+          <a:fontRef idx="minor">
+            <a:schemeClr val="lt1"/>
+          </a:fontRef>
+        </p:style>
+        <p:txBody>
+          <a:bodyPr vertOverflow="clip" horzOverflow="clip" rtlCol="0" anchor="t"/>
+          <a:lstStyle/>
+          <a:p>
+            <a:pPr algn="l"/>
+            <a:endParaRPr lang="en-US" dirty="0"/>
+          </a:p>
+        </p:txBody>
+      </p:sp>
+      <p:sp>
+        <p:nvSpPr>
+          <p:cNvPr id="38" name="Text 1">
+            <a:extLst>
+              <a:ext uri="{FF2B5EF4-FFF2-40B4-BE49-F238E27FC236}">
+                <a16:creationId xmlns:a16="http://schemas.microsoft.com/office/drawing/2014/main" id="{365E8963-2D87-FCCF-0A82-4FE70351544A}"/>
+              </a:ext>
+            </a:extLst>
+          </p:cNvPr>
+          <p:cNvSpPr/>
+          <p:nvPr/>
+        </p:nvSpPr>
+        <p:spPr>
+          <a:xfrm>
+            <a:off x="731520" y="426720"/>
+            <a:ext cx="2438400" cy="341376"/>
+          </a:xfrm>
+          <a:prstGeom prst="rect">
+            <a:avLst/>
+          </a:prstGeom>
+          <a:solidFill>
+            <a:srgbClr val="002060"/>
+          </a:solidFill>
+          <a:ln/>
+        </p:spPr>
+        <p:txBody>
+          <a:bodyPr wrap="square" rtlCol="0" anchor="ctr"/>
+          <a:lstStyle/>
+          <a:p>
+            <a:pPr algn="ctr"/>
+            <a:r>
+              <a:rPr lang="en-US" sz="1067" b="1" kern="0" spc="400" dirty="0">
+                <a:solidFill>
+                  <a:srgbClr val="D4A843"/>
+                </a:solidFill>
+                <a:latin typeface="Calibri" pitchFamily="34" charset="0"/>
+                <a:cs typeface="Calibri" pitchFamily="34" charset="-120"/>
+              </a:rPr>
+              <a:t>SEE IT IN ACTION</a:t>
+            </a:r>
+            <a:endParaRPr lang="en-US" sz="1067" dirty="0"/>
+          </a:p>
+        </p:txBody>
+      </p:sp>
+      <p:sp>
+        <p:nvSpPr>
+          <p:cNvPr id="40" name="TextBox 39">
+            <a:extLst>
+              <a:ext uri="{FF2B5EF4-FFF2-40B4-BE49-F238E27FC236}">
+                <a16:creationId xmlns:a16="http://schemas.microsoft.com/office/drawing/2014/main" id="{2F6F26F8-3497-B340-BDB5-59D9388E6451}"/>
+              </a:ext>
+            </a:extLst>
+          </p:cNvPr>
+          <p:cNvSpPr txBox="1"/>
+          <p:nvPr/>
+        </p:nvSpPr>
+        <p:spPr>
+          <a:xfrm>
+            <a:off x="731520" y="914400"/>
+            <a:ext cx="10728960" cy="584775"/>
+          </a:xfrm>
+          <a:prstGeom prst="rect">
+            <a:avLst/>
+          </a:prstGeom>
+          <a:noFill/>
+        </p:spPr>
+        <p:txBody>
+          <a:bodyPr vertOverflow="overflow" vert="horz" wrap="square" rtlCol="0" anchor="t">
+            <a:spAutoFit/>
+          </a:bodyPr>
+          <a:lstStyle/>
+          <a:p>
+            <a:r>
+              <a:rPr lang="en-US" sz="3200" b="1" dirty="0">
+                <a:solidFill>
+                  <a:srgbClr val="1C2456"/>
+                </a:solidFill>
+                <a:latin typeface="Georgia" pitchFamily="34" charset="0"/>
+                <a:ea typeface="Georgia" pitchFamily="34" charset="-122"/>
+                <a:cs typeface="Georgia" pitchFamily="34" charset="-120"/>
+              </a:rPr>
+              <a:t>How it works</a:t>
+            </a:r>
+          </a:p>
+        </p:txBody>
+      </p:sp>
+      <p:sp>
+        <p:nvSpPr>
+          <p:cNvPr id="54" name="Circle 1"/>
+          <p:cNvSpPr/>
+          <p:nvPr/>
+        </p:nvSpPr>
+        <p:spPr>
+          <a:xfrm>
+            <a:off x="1231900" y="2667000"/>
+            <a:ext cx="787400" cy="787400"/>
+          </a:xfrm>
+          <a:prstGeom prst="ellipse">
+            <a:avLst/>
+          </a:prstGeom>
+          <a:solidFill>
+            <a:srgbClr val="1C2456"/>
+          </a:solidFill>
+          <a:ln>
+            <a:noFill/>
+          </a:ln>
+        </p:spPr>
+        <p:txBody>
+          <a:bodyPr wrap="none" lIns="0" tIns="0" rIns="0" bIns="0" anchor="ctr" anchorCtr="1"/>
+          <a:lstStyle/>
+          <a:p>
+            <a:pPr algn="ctr"/>
+            <a:r>
+              <a:rPr lang="en-US" sz="2400" b="1" dirty="0">
+                <a:solidFill>
+                  <a:srgbClr val="FFFFFF"/>
+                </a:solidFill>
+                <a:latin typeface="Calibri" pitchFamily="34" charset="0"/>
+              </a:rPr>
+              <a:t>1</a:t>
+            </a:r>
+          </a:p>
+        </p:txBody>
+      </p:sp>
+      <p:sp>
+        <p:nvSpPr>
+          <p:cNvPr id="55" name="Circle 2"/>
+          <p:cNvSpPr/>
+          <p:nvPr/>
+        </p:nvSpPr>
+        <p:spPr>
+          <a:xfrm>
+            <a:off x="3263900" y="2667000"/>
+            <a:ext cx="787400" cy="787400"/>
+          </a:xfrm>
+          <a:prstGeom prst="ellipse">
+            <a:avLst/>
+          </a:prstGeom>
+          <a:solidFill>
+            <a:srgbClr val="1C2456"/>
+          </a:solidFill>
+          <a:ln>
+            <a:noFill/>
+          </a:ln>
+        </p:spPr>
+        <p:txBody>
+          <a:bodyPr wrap="none" lIns="0" tIns="0" rIns="0" bIns="0" anchor="ctr" anchorCtr="1"/>
+          <a:lstStyle/>
+          <a:p>
+            <a:pPr algn="ctr"/>
+            <a:r>
+              <a:rPr lang="en-US" sz="2400" b="1" dirty="0">
+                <a:solidFill>
+                  <a:srgbClr val="FFFFFF"/>
+                </a:solidFill>
+                <a:latin typeface="Calibri" pitchFamily="34" charset="0"/>
+              </a:rPr>
+              <a:t>2</a:t>
+            </a:r>
+          </a:p>
+        </p:txBody>
+      </p:sp>
+      <p:sp>
+        <p:nvSpPr>
+          <p:cNvPr id="56" name="Circle 3"/>
+          <p:cNvSpPr/>
+          <p:nvPr/>
+        </p:nvSpPr>
+        <p:spPr>
+          <a:xfrm>
+            <a:off x="5702300" y="2667000"/>
+            <a:ext cx="787400" cy="787400"/>
+          </a:xfrm>
+          <a:prstGeom prst="ellipse">
+            <a:avLst/>
+          </a:prstGeom>
+          <a:solidFill>
+            <a:srgbClr val="D4A843"/>
+          </a:solidFill>
+          <a:ln>
+            <a:noFill/>
+          </a:ln>
+        </p:spPr>
+        <p:txBody>
+          <a:bodyPr wrap="none" lIns="0" tIns="0" rIns="0" bIns="0" anchor="ctr" anchorCtr="1"/>
+          <a:lstStyle/>
+          <a:p>
+            <a:pPr algn="ctr"/>
+            <a:r>
+              <a:rPr lang="en-US" sz="2400" b="1" dirty="0">
+                <a:solidFill>
+                  <a:srgbClr val="FFFFFF"/>
+                </a:solidFill>
+                <a:latin typeface="Calibri" pitchFamily="34" charset="0"/>
+              </a:rPr>
+              <a:t>3</a:t>
+            </a:r>
+          </a:p>
+        </p:txBody>
+      </p:sp>
+      <p:sp>
+        <p:nvSpPr>
+          <p:cNvPr id="57" name="Circle 4"/>
+          <p:cNvSpPr/>
+          <p:nvPr/>
+        </p:nvSpPr>
+        <p:spPr>
+          <a:xfrm>
+            <a:off x="8140700" y="2667000"/>
+            <a:ext cx="787400" cy="787400"/>
+          </a:xfrm>
+          <a:prstGeom prst="ellipse">
+            <a:avLst/>
+          </a:prstGeom>
+          <a:solidFill>
+            <a:srgbClr val="D4A843"/>
+          </a:solidFill>
+          <a:ln>
+            <a:noFill/>
+          </a:ln>
+        </p:spPr>
+        <p:txBody>
+          <a:bodyPr wrap="none" lIns="0" tIns="0" rIns="0" bIns="0" anchor="ctr" anchorCtr="1"/>
+          <a:lstStyle/>
+          <a:p>
+            <a:pPr algn="ctr"/>
+            <a:r>
+              <a:rPr lang="en-US" sz="2400" b="1" dirty="0">
+                <a:solidFill>
+                  <a:srgbClr val="FFFFFF"/>
+                </a:solidFill>
+                <a:latin typeface="Calibri" pitchFamily="34" charset="0"/>
+              </a:rPr>
+              <a:t>4</a:t>
+            </a:r>
+          </a:p>
+        </p:txBody>
+      </p:sp>
+      <p:sp>
+        <p:nvSpPr>
+          <p:cNvPr id="58" name="Circle 5"/>
+          <p:cNvSpPr/>
+          <p:nvPr/>
+        </p:nvSpPr>
+        <p:spPr>
+          <a:xfrm>
+            <a:off x="10172700" y="2667000"/>
+            <a:ext cx="787400" cy="787400"/>
+          </a:xfrm>
+          <a:prstGeom prst="ellipse">
+            <a:avLst/>
+          </a:prstGeom>
+          <a:solidFill>
+            <a:srgbClr val="D4A843"/>
+          </a:solidFill>
+          <a:ln>
+            <a:noFill/>
+          </a:ln>
+        </p:spPr>
+        <p:txBody>
+          <a:bodyPr wrap="none" lIns="0" tIns="0" rIns="0" bIns="0" anchor="ctr" anchorCtr="1"/>
+          <a:lstStyle/>
+          <a:p>
+            <a:pPr algn="ctr"/>
+            <a:r>
+              <a:rPr lang="en-US" sz="2400" b="1" dirty="0">
+                <a:solidFill>
+                  <a:srgbClr val="FFFFFF"/>
+                </a:solidFill>
+                <a:latin typeface="Calibri" pitchFamily="34" charset="0"/>
+              </a:rPr>
+              <a:t>5</a:t>
+            </a:r>
+          </a:p>
+        </p:txBody>
+      </p:sp>
+      <p:sp>
+        <p:nvSpPr>
+          <p:cNvPr id="59" name="Text 59"/>
+          <p:cNvSpPr txBox="1"/>
+          <p:nvPr/>
+        </p:nvSpPr>
+        <p:spPr>
+          <a:xfrm>
+            <a:off x="2387600" y="2882900"/>
+            <a:ext cx="508000" cy="355600"/>
+          </a:xfrm>
+          <a:prstGeom prst="rect">
+            <a:avLst/>
+          </a:prstGeom>
+          <a:noFill/>
+          <a:ln>
+            <a:noFill/>
+          </a:ln>
+        </p:spPr>
+        <p:txBody>
+          <a:bodyPr wrap="square" lIns="0" tIns="0" rIns="0" bIns="0" anchor="t"/>
+          <a:lstStyle/>
+          <a:p>
+            <a:pPr algn="ctr"/>
+            <a:r>
+              <a:rPr lang="en-US" sz="2000" dirty="0">
+                <a:solidFill>
+                  <a:srgbClr val="1C2456"/>
+                </a:solidFill>
+                <a:latin typeface="Arial" pitchFamily="34" charset="0"/>
+              </a:rPr>
+              <a:t>→</a:t>
+            </a:r>
+          </a:p>
+        </p:txBody>
+      </p:sp>
+      <p:sp>
+        <p:nvSpPr>
+          <p:cNvPr id="60" name="Text 60"/>
+          <p:cNvSpPr txBox="1"/>
+          <p:nvPr/>
+        </p:nvSpPr>
+        <p:spPr>
+          <a:xfrm>
+            <a:off x="4622800" y="2882900"/>
+            <a:ext cx="508000" cy="355600"/>
+          </a:xfrm>
+          <a:prstGeom prst="rect">
+            <a:avLst/>
+          </a:prstGeom>
+          <a:noFill/>
+          <a:ln>
+            <a:noFill/>
+          </a:ln>
+        </p:spPr>
+        <p:txBody>
+          <a:bodyPr wrap="square" lIns="0" tIns="0" rIns="0" bIns="0" anchor="t"/>
+          <a:lstStyle/>
+          <a:p>
+            <a:pPr algn="ctr"/>
+            <a:r>
+              <a:rPr lang="en-US" sz="2000" dirty="0">
+                <a:solidFill>
+                  <a:srgbClr val="1C2456"/>
+                </a:solidFill>
+                <a:latin typeface="Arial" pitchFamily="34" charset="0"/>
+              </a:rPr>
+              <a:t>→</a:t>
+            </a:r>
+          </a:p>
+        </p:txBody>
+      </p:sp>
+      <p:sp>
+        <p:nvSpPr>
+          <p:cNvPr id="61" name="Text 61"/>
+          <p:cNvSpPr txBox="1"/>
+          <p:nvPr/>
+        </p:nvSpPr>
+        <p:spPr>
+          <a:xfrm>
+            <a:off x="7061200" y="2882900"/>
+            <a:ext cx="508000" cy="355600"/>
+          </a:xfrm>
+          <a:prstGeom prst="rect">
+            <a:avLst/>
+          </a:prstGeom>
+          <a:noFill/>
+          <a:ln>
+            <a:noFill/>
+          </a:ln>
+        </p:spPr>
+        <p:txBody>
+          <a:bodyPr wrap="square" lIns="0" tIns="0" rIns="0" bIns="0" anchor="t"/>
+          <a:lstStyle/>
+          <a:p>
+            <a:pPr algn="ctr"/>
+            <a:r>
+              <a:rPr lang="en-US" sz="2000" dirty="0">
+                <a:solidFill>
+                  <a:srgbClr val="D4A843"/>
+                </a:solidFill>
+                <a:latin typeface="Arial" pitchFamily="34" charset="0"/>
+              </a:rPr>
+              <a:t>→</a:t>
+            </a:r>
+          </a:p>
+        </p:txBody>
+      </p:sp>
+      <p:sp>
+        <p:nvSpPr>
+          <p:cNvPr id="62" name="Text 62"/>
+          <p:cNvSpPr txBox="1"/>
+          <p:nvPr/>
+        </p:nvSpPr>
+        <p:spPr>
+          <a:xfrm>
+            <a:off x="9296400" y="2882900"/>
+            <a:ext cx="508000" cy="355600"/>
+          </a:xfrm>
+          <a:prstGeom prst="rect">
+            <a:avLst/>
+          </a:prstGeom>
+          <a:noFill/>
+          <a:ln>
+            <a:noFill/>
+          </a:ln>
+        </p:spPr>
+        <p:txBody>
+          <a:bodyPr wrap="square" lIns="0" tIns="0" rIns="0" bIns="0" anchor="t"/>
+          <a:lstStyle/>
+          <a:p>
+            <a:pPr algn="ctr"/>
+            <a:r>
+              <a:rPr lang="en-US" sz="2000" dirty="0">
+                <a:solidFill>
+                  <a:srgbClr val="D4A843"/>
+                </a:solidFill>
+                <a:latin typeface="Arial" pitchFamily="34" charset="0"/>
+              </a:rPr>
+              <a:t>→</a:t>
+            </a:r>
+          </a:p>
+        </p:txBody>
+      </p:sp>
+      <p:sp>
+        <p:nvSpPr>
+          <p:cNvPr id="63" name="Text 63"/>
+          <p:cNvSpPr txBox="1"/>
+          <p:nvPr/>
+        </p:nvSpPr>
+        <p:spPr>
+          <a:xfrm>
+            <a:off x="863600" y="3632200"/>
+            <a:ext cx="1524000" cy="381000"/>
+          </a:xfrm>
+          <a:prstGeom prst="rect">
+            <a:avLst/>
+          </a:prstGeom>
+          <a:noFill/>
+          <a:ln>
+            <a:noFill/>
+          </a:ln>
+        </p:spPr>
+        <p:txBody>
+          <a:bodyPr wrap="square" lIns="0" tIns="0" rIns="0" bIns="0" anchor="t"/>
+          <a:lstStyle/>
+          <a:p>
+            <a:pPr algn="ctr"/>
+            <a:r>
+              <a:rPr lang="en-US" sz="1800" b="1" dirty="0">
+                <a:solidFill>
+                  <a:srgbClr val="1C2456"/>
+                </a:solidFill>
+                <a:latin typeface="Calibri" pitchFamily="34" charset="0"/>
+              </a:rPr>
+              <a:t>Send</a:t>
+            </a:r>
+          </a:p>
+        </p:txBody>
+      </p:sp>
+      <p:sp>
+        <p:nvSpPr>
+          <p:cNvPr id="64" name="Text 64"/>
+          <p:cNvSpPr txBox="1"/>
+          <p:nvPr/>
+        </p:nvSpPr>
+        <p:spPr>
+          <a:xfrm>
+            <a:off x="2895600" y="3632200"/>
+            <a:ext cx="1524000" cy="381000"/>
+          </a:xfrm>
+          <a:prstGeom prst="rect">
+            <a:avLst/>
+          </a:prstGeom>
+          <a:noFill/>
+          <a:ln>
+            <a:noFill/>
+          </a:ln>
+        </p:spPr>
+        <p:txBody>
+          <a:bodyPr wrap="square" lIns="0" tIns="0" rIns="0" bIns="0" anchor="t"/>
+          <a:lstStyle/>
+          <a:p>
+            <a:pPr algn="ctr"/>
+            <a:r>
+              <a:rPr lang="en-US" sz="1800" b="1" dirty="0">
+                <a:solidFill>
+                  <a:srgbClr val="1C2456"/>
+                </a:solidFill>
+                <a:latin typeface="Calibri" pitchFamily="34" charset="0"/>
+              </a:rPr>
+              <a:t>Create</a:t>
+            </a:r>
+          </a:p>
+        </p:txBody>
+      </p:sp>
+      <p:sp>
+        <p:nvSpPr>
+          <p:cNvPr id="65" name="Text 65"/>
+          <p:cNvSpPr txBox="1"/>
+          <p:nvPr/>
+        </p:nvSpPr>
+        <p:spPr>
+          <a:xfrm>
+            <a:off x="5334000" y="3632200"/>
+            <a:ext cx="1524000" cy="381000"/>
+          </a:xfrm>
+          <a:prstGeom prst="rect">
+            <a:avLst/>
+          </a:prstGeom>
+          <a:noFill/>
+          <a:ln>
+            <a:noFill/>
+          </a:ln>
+        </p:spPr>
+        <p:txBody>
+          <a:bodyPr wrap="square" lIns="0" tIns="0" rIns="0" bIns="0" anchor="t"/>
+          <a:lstStyle/>
+          <a:p>
+            <a:pPr algn="ctr"/>
+            <a:r>
+              <a:rPr lang="en-US" sz="1800" b="1" dirty="0">
+                <a:solidFill>
+                  <a:srgbClr val="1C2456"/>
+                </a:solidFill>
+                <a:latin typeface="Calibri" pitchFamily="34" charset="0"/>
+              </a:rPr>
+              <a:t>Explore</a:t>
+            </a:r>
+          </a:p>
+        </p:txBody>
+      </p:sp>
+      <p:sp>
+        <p:nvSpPr>
+          <p:cNvPr id="66" name="Text 66"/>
+          <p:cNvSpPr txBox="1"/>
+          <p:nvPr/>
+        </p:nvSpPr>
+        <p:spPr>
+          <a:xfrm>
+            <a:off x="7772400" y="3632200"/>
+            <a:ext cx="1524000" cy="381000"/>
+          </a:xfrm>
+          <a:prstGeom prst="rect">
+            <a:avLst/>
+          </a:prstGeom>
+          <a:noFill/>
+          <a:ln>
+            <a:noFill/>
+          </a:ln>
+        </p:spPr>
+        <p:txBody>
+          <a:bodyPr wrap="square" lIns="0" tIns="0" rIns="0" bIns="0" anchor="t"/>
+          <a:lstStyle/>
+          <a:p>
+            <a:pPr algn="ctr"/>
+            <a:r>
+              <a:rPr lang="en-US" sz="1800" b="1" dirty="0">
+                <a:solidFill>
+                  <a:srgbClr val="1C2456"/>
+                </a:solidFill>
+                <a:latin typeface="Calibri" pitchFamily="34" charset="0"/>
+              </a:rPr>
+              <a:t>Pin</a:t>
+            </a:r>
+          </a:p>
+        </p:txBody>
+      </p:sp>
+      <p:sp>
+        <p:nvSpPr>
+          <p:cNvPr id="67" name="Text 67"/>
+          <p:cNvSpPr txBox="1"/>
+          <p:nvPr/>
+        </p:nvSpPr>
+        <p:spPr>
+          <a:xfrm>
+            <a:off x="9804400" y="3632200"/>
+            <a:ext cx="1524000" cy="381000"/>
+          </a:xfrm>
+          <a:prstGeom prst="rect">
+            <a:avLst/>
+          </a:prstGeom>
+          <a:noFill/>
+          <a:ln>
+            <a:noFill/>
+          </a:ln>
+        </p:spPr>
+        <p:txBody>
+          <a:bodyPr wrap="square" lIns="0" tIns="0" rIns="0" bIns="0" anchor="t"/>
+          <a:lstStyle/>
+          <a:p>
+            <a:pPr algn="ctr"/>
+            <a:r>
+              <a:rPr lang="en-US" sz="1800" b="1" dirty="0">
+                <a:solidFill>
+                  <a:srgbClr val="1C2456"/>
+                </a:solidFill>
+                <a:latin typeface="Calibri" pitchFamily="34" charset="0"/>
+              </a:rPr>
+              <a:t>Present</a:t>
+            </a:r>
+          </a:p>
+        </p:txBody>
+      </p:sp>
+      <p:sp>
+        <p:nvSpPr>
+          <p:cNvPr id="68" name="Text 68"/>
+          <p:cNvSpPr txBox="1"/>
+          <p:nvPr/>
+        </p:nvSpPr>
+        <p:spPr>
+          <a:xfrm>
+            <a:off x="736600" y="4038600"/>
+            <a:ext cx="1778000" cy="304800"/>
+          </a:xfrm>
+          <a:prstGeom prst="rect">
+            <a:avLst/>
+          </a:prstGeom>
+          <a:noFill/>
+          <a:ln>
+            <a:noFill/>
+          </a:ln>
+        </p:spPr>
+        <p:txBody>
+          <a:bodyPr wrap="square" lIns="0" tIns="0" rIns="0" bIns="0" anchor="t"/>
+          <a:lstStyle/>
+          <a:p>
+            <a:pPr algn="ctr"/>
+            <a:r>
+              <a:rPr lang="en-US" sz="1400" dirty="0">
+                <a:solidFill>
+                  <a:srgbClr val="3A3F55"/>
+                </a:solidFill>
+                <a:latin typeface="Calibri" pitchFamily="34" charset="0"/>
+              </a:rPr>
+              <a:t>Your data</a:t>
+            </a:r>
+          </a:p>
+        </p:txBody>
+      </p:sp>
+      <p:sp>
+        <p:nvSpPr>
+          <p:cNvPr id="69" name="Text 69"/>
+          <p:cNvSpPr txBox="1"/>
+          <p:nvPr/>
+        </p:nvSpPr>
+        <p:spPr>
+          <a:xfrm>
+            <a:off x="2768600" y="4038600"/>
+            <a:ext cx="1778000" cy="304800"/>
+          </a:xfrm>
+          <a:prstGeom prst="rect">
+            <a:avLst/>
+          </a:prstGeom>
+          <a:noFill/>
+          <a:ln>
+            <a:noFill/>
+          </a:ln>
+        </p:spPr>
+        <p:txBody>
+          <a:bodyPr wrap="square" lIns="0" tIns="0" rIns="0" bIns="0" anchor="t"/>
+          <a:lstStyle/>
+          <a:p>
+            <a:pPr algn="ctr"/>
+            <a:r>
+              <a:rPr lang="en-US" sz="1400" dirty="0">
+                <a:solidFill>
+                  <a:srgbClr val="3A3F55"/>
+                </a:solidFill>
+                <a:latin typeface="Calibri" pitchFamily="34" charset="0"/>
+              </a:rPr>
+              <a:t>Your report</a:t>
+            </a:r>
+          </a:p>
+        </p:txBody>
+      </p:sp>
+      <p:sp>
+        <p:nvSpPr>
+          <p:cNvPr id="70" name="Text 70"/>
+          <p:cNvSpPr txBox="1"/>
+          <p:nvPr/>
+        </p:nvSpPr>
+        <p:spPr>
+          <a:xfrm>
+            <a:off x="5207000" y="4038600"/>
+            <a:ext cx="1778000" cy="304800"/>
+          </a:xfrm>
+          <a:prstGeom prst="rect">
+            <a:avLst/>
+          </a:prstGeom>
+          <a:noFill/>
+          <a:ln>
+            <a:noFill/>
+          </a:ln>
+        </p:spPr>
+        <p:txBody>
+          <a:bodyPr wrap="square" lIns="0" tIns="0" rIns="0" bIns="0" anchor="t"/>
+          <a:lstStyle/>
+          <a:p>
+            <a:pPr algn="ctr"/>
+            <a:r>
+              <a:rPr lang="en-US" sz="1400" dirty="0">
+                <a:solidFill>
+                  <a:srgbClr val="3A3F55"/>
+                </a:solidFill>
+                <a:latin typeface="Calibri" pitchFamily="34" charset="0"/>
+              </a:rPr>
+              <a:t>Tables &amp; charts</a:t>
+            </a:r>
+          </a:p>
+        </p:txBody>
+      </p:sp>
+      <p:sp>
+        <p:nvSpPr>
+          <p:cNvPr id="71" name="Text 71"/>
+          <p:cNvSpPr txBox="1"/>
+          <p:nvPr/>
+        </p:nvSpPr>
+        <p:spPr>
+          <a:xfrm>
+            <a:off x="7645400" y="4038600"/>
+            <a:ext cx="1778000" cy="304800"/>
+          </a:xfrm>
+          <a:prstGeom prst="rect">
+            <a:avLst/>
+          </a:prstGeom>
+          <a:noFill/>
+          <a:ln>
+            <a:noFill/>
+          </a:ln>
+        </p:spPr>
+        <p:txBody>
+          <a:bodyPr wrap="square" lIns="0" tIns="0" rIns="0" bIns="0" anchor="t"/>
+          <a:lstStyle/>
+          <a:p>
+            <a:pPr algn="ctr"/>
+            <a:r>
+              <a:rPr lang="en-US" sz="1400" dirty="0">
+                <a:solidFill>
+                  <a:srgbClr val="3A3F55"/>
+                </a:solidFill>
+                <a:latin typeface="Calibri" pitchFamily="34" charset="0"/>
+              </a:rPr>
+              <a:t>Key findings</a:t>
+            </a:r>
+          </a:p>
+        </p:txBody>
+      </p:sp>
+      <p:sp>
+        <p:nvSpPr>
+          <p:cNvPr id="72" name="Text 72"/>
+          <p:cNvSpPr txBox="1"/>
+          <p:nvPr/>
+        </p:nvSpPr>
+        <p:spPr>
+          <a:xfrm>
+            <a:off x="9677400" y="4038600"/>
+            <a:ext cx="1778000" cy="304800"/>
+          </a:xfrm>
+          <a:prstGeom prst="rect">
+            <a:avLst/>
+          </a:prstGeom>
+          <a:noFill/>
+          <a:ln>
+            <a:noFill/>
+          </a:ln>
+        </p:spPr>
+        <p:txBody>
+          <a:bodyPr wrap="square" lIns="0" tIns="0" rIns="0" bIns="0" anchor="t"/>
+          <a:lstStyle/>
+          <a:p>
+            <a:pPr algn="ctr"/>
+            <a:r>
+              <a:rPr lang="en-US" sz="1400" dirty="0">
+                <a:solidFill>
+                  <a:srgbClr val="3A3F55"/>
+                </a:solidFill>
+                <a:latin typeface="Calibri" pitchFamily="34" charset="0"/>
+              </a:rPr>
+              <a:t>Your story</a:t>
+            </a:r>
+          </a:p>
+        </p:txBody>
+      </p:sp>
+      <p:sp>
+        <p:nvSpPr>
+          <p:cNvPr id="73" name="Tagline"/>
+          <p:cNvSpPr txBox="1"/>
+          <p:nvPr/>
+        </p:nvSpPr>
+        <p:spPr>
+          <a:xfrm>
+            <a:off x="1219200" y="5397500"/>
+            <a:ext cx="9753600" cy="609600"/>
+          </a:xfrm>
+          <a:prstGeom prst="rect">
+            <a:avLst/>
+          </a:prstGeom>
+          <a:noFill/>
+          <a:ln>
+            <a:noFill/>
+          </a:ln>
+        </p:spPr>
+        <p:txBody>
+          <a:bodyPr wrap="square" lIns="0" tIns="0" rIns="0" bIns="0" anchor="t"/>
+          <a:lstStyle/>
+          <a:p>
+            <a:pPr algn="ctr"/>
+            <a:r>
+              <a:rPr lang="en-US" sz="1800" i="1" dirty="0">
+                <a:solidFill>
+                  <a:srgbClr val="B8922F"/>
+                </a:solidFill>
+                <a:latin typeface="Georgia" pitchFamily="34" charset="0"/>
+              </a:rPr>
+              <a:t>You send the data. We build the report. You explore the story.</a:t>
+            </a:r>
+          </a:p>
+        </p:txBody>
+      </p:sp>
+      <p:sp>
+        <p:nvSpPr>
+          <p:cNvPr id="74" name="AccentLine"/>
+          <p:cNvSpPr/>
+          <p:nvPr/>
+        </p:nvSpPr>
+        <p:spPr>
+          <a:xfrm>
+            <a:off x="1104900" y="5080000"/>
+            <a:ext cx="9982200" cy="19050"/>
+          </a:xfrm>
+          <a:prstGeom prst="rect">
+            <a:avLst/>
+          </a:prstGeom>
+          <a:solidFill>
+            <a:srgbClr val="E0E0E0"/>
+          </a:solidFill>
+          <a:ln>
+            <a:noFill/>
+          </a:ln>
+        </p:spPr>
+        <p:txBody>
+          <a:bodyPr/>
+          <a:lstStyle/>
+          <a:p>
+            <a:endParaRPr lang="en-US" dirty="0"/>
+          </a:p>
+        </p:txBody>
+      </p:sp>
+      <p:sp>
+        <p:nvSpPr>
+          <p:cNvPr id="4" name="TextBox 3">
+            <a:extLst>
+              <a:ext uri="{FF2B5EF4-FFF2-40B4-BE49-F238E27FC236}">
+                <a16:creationId xmlns:a16="http://schemas.microsoft.com/office/drawing/2014/main" id="{31BB3A0E-25ED-AF43-9384-9F9531E903D9}"/>
+              </a:ext>
+            </a:extLst>
+          </p:cNvPr>
+          <p:cNvSpPr txBox="1"/>
+          <p:nvPr/>
+        </p:nvSpPr>
+        <p:spPr>
+          <a:xfrm>
+            <a:off x="1016000" y="2222500"/>
+            <a:ext cx="3733800" cy="254000"/>
+          </a:xfrm>
+          <a:prstGeom prst="rect">
+            <a:avLst/>
+          </a:prstGeom>
+          <a:noFill/>
+        </p:spPr>
+        <p:txBody>
+          <a:bodyPr vertOverflow="overflow" vert="horz" wrap="square" rtlCol="0" anchor="t">
+            <a:noAutofit/>
+          </a:bodyPr>
+          <a:lstStyle/>
+          <a:p>
+            <a:pPr algn="l"/>
+            <a:r>
+              <a:rPr lang="en-US" sz="1400" b="1" dirty="0">
+                <a:solidFill>
+                  <a:srgbClr val="1C2456"/>
+                </a:solidFill>
+                <a:latin typeface="Calibri"/>
+                <a:cs typeface="Calibri"/>
+              </a:rPr>
+              <a:t>WE DO</a:t>
+            </a:r>
+          </a:p>
+        </p:txBody>
+      </p:sp>
+      <p:sp>
+        <p:nvSpPr>
+          <p:cNvPr id="5" name="TextBox 4">
+            <a:extLst>
+              <a:ext uri="{FF2B5EF4-FFF2-40B4-BE49-F238E27FC236}">
+                <a16:creationId xmlns:a16="http://schemas.microsoft.com/office/drawing/2014/main" id="{F5B2F7A7-6BFE-064D-A96B-BFF124C04F40}"/>
+              </a:ext>
+            </a:extLst>
+          </p:cNvPr>
+          <p:cNvSpPr txBox="1"/>
+          <p:nvPr/>
+        </p:nvSpPr>
+        <p:spPr>
+          <a:xfrm>
+            <a:off x="4991100" y="2222500"/>
+            <a:ext cx="6273800" cy="254000"/>
+          </a:xfrm>
+          <a:prstGeom prst="rect">
+            <a:avLst/>
+          </a:prstGeom>
+          <a:noFill/>
+        </p:spPr>
+        <p:txBody>
+          <a:bodyPr vertOverflow="overflow" vert="horz" wrap="square" rtlCol="0" anchor="t">
+            <a:noAutofit/>
+          </a:bodyPr>
+          <a:lstStyle/>
+          <a:p>
+            <a:pPr algn="l"/>
+            <a:r>
+              <a:rPr lang="en-US" sz="1400" b="1" dirty="0">
+                <a:solidFill>
+                  <a:srgbClr val="1C2456"/>
+                </a:solidFill>
+                <a:latin typeface="Calibri"/>
+                <a:cs typeface="Calibri"/>
+              </a:rPr>
+              <a:t>YOU DO</a:t>
+            </a:r>
+          </a:p>
+        </p:txBody>
+      </p:sp>
+      <p:sp>
+        <p:nvSpPr>
           <p:cNvPr id="21" name="Shape 19">
             <a:extLst>
               <a:ext uri="{FF2B5EF4-FFF2-40B4-BE49-F238E27FC236}">
@@ -6018,7 +7090,7 @@
           <a:bodyPr/>
           <a:lstStyle/>
           <a:p>
-            <a:endParaRPr lang="en-US" sz="2400"/>
+            <a:endParaRPr lang="en-US" sz="2400" dirty="0"/>
           </a:p>
         </p:txBody>
       </p:sp>
@@ -6051,634 +7123,14 @@
           <a:bodyPr/>
           <a:lstStyle/>
           <a:p>
-            <a:endParaRPr lang="en-US" sz="2400"/>
-          </a:p>
-        </p:txBody>
-      </p:sp>
-      <p:sp>
-        <p:nvSpPr>
-          <p:cNvPr id="24" name="Shape 2">
-            <a:extLst>
-              <a:ext uri="{FF2B5EF4-FFF2-40B4-BE49-F238E27FC236}">
-                <a16:creationId xmlns:a16="http://schemas.microsoft.com/office/drawing/2014/main" id="{7988EAA1-51F7-F4B7-F1C4-57B241E4E264}"/>
-              </a:ext>
-            </a:extLst>
-          </p:cNvPr>
-          <p:cNvSpPr/>
-          <p:nvPr/>
-        </p:nvSpPr>
-        <p:spPr>
-          <a:xfrm>
-            <a:off x="2926080" y="1874099"/>
-            <a:ext cx="548640" cy="548640"/>
-          </a:xfrm>
-          <a:prstGeom prst="ellipse">
-            <a:avLst/>
-          </a:prstGeom>
-          <a:solidFill>
-            <a:srgbClr val="D4A843"/>
-          </a:solidFill>
-          <a:ln/>
-        </p:spPr>
-        <p:txBody>
-          <a:bodyPr/>
-          <a:lstStyle/>
-          <a:p>
-            <a:endParaRPr lang="en-US" sz="2400">
-              <a:solidFill>
-                <a:schemeClr val="tx2"/>
-              </a:solidFill>
-            </a:endParaRPr>
-          </a:p>
-        </p:txBody>
-      </p:sp>
-      <p:sp>
-        <p:nvSpPr>
-          <p:cNvPr id="25" name="Text 3">
-            <a:extLst>
-              <a:ext uri="{FF2B5EF4-FFF2-40B4-BE49-F238E27FC236}">
-                <a16:creationId xmlns:a16="http://schemas.microsoft.com/office/drawing/2014/main" id="{633BCDA9-8053-E982-440B-DCBE96698367}"/>
-              </a:ext>
-            </a:extLst>
-          </p:cNvPr>
-          <p:cNvSpPr/>
-          <p:nvPr/>
-        </p:nvSpPr>
-        <p:spPr>
-          <a:xfrm>
-            <a:off x="2926080" y="1874099"/>
-            <a:ext cx="548640" cy="548640"/>
-          </a:xfrm>
-          <a:prstGeom prst="rect">
-            <a:avLst/>
-          </a:prstGeom>
-          <a:noFill/>
-          <a:ln/>
-        </p:spPr>
-        <p:txBody>
-          <a:bodyPr wrap="square" rtlCol="0" anchor="ctr"/>
-          <a:lstStyle/>
-          <a:p>
-            <a:pPr algn="ctr"/>
-            <a:r>
-              <a:rPr lang="en-US" sz="1867" b="1" dirty="0">
-                <a:solidFill>
-                  <a:schemeClr val="tx2"/>
-                </a:solidFill>
-                <a:latin typeface="Calibri" pitchFamily="34" charset="0"/>
-                <a:ea typeface="Calibri" pitchFamily="34" charset="-122"/>
-                <a:cs typeface="Calibri" pitchFamily="34" charset="-120"/>
-              </a:rPr>
-              <a:t>1</a:t>
-            </a:r>
-            <a:endParaRPr lang="en-US" sz="1867" dirty="0">
-              <a:solidFill>
-                <a:schemeClr val="tx2"/>
-              </a:solidFill>
-            </a:endParaRPr>
-          </a:p>
-        </p:txBody>
-      </p:sp>
-      <p:sp>
-        <p:nvSpPr>
-          <p:cNvPr id="26" name="Text 4">
-            <a:extLst>
-              <a:ext uri="{FF2B5EF4-FFF2-40B4-BE49-F238E27FC236}">
-                <a16:creationId xmlns:a16="http://schemas.microsoft.com/office/drawing/2014/main" id="{9D816CFE-881E-84B0-6FBC-1E237641EAC8}"/>
-              </a:ext>
-            </a:extLst>
-          </p:cNvPr>
-          <p:cNvSpPr/>
-          <p:nvPr/>
-        </p:nvSpPr>
-        <p:spPr>
-          <a:xfrm>
-            <a:off x="2438400" y="2544659"/>
-            <a:ext cx="1524000" cy="426720"/>
-          </a:xfrm>
-          <a:prstGeom prst="rect">
-            <a:avLst/>
-          </a:prstGeom>
-          <a:noFill/>
-          <a:ln/>
-        </p:spPr>
-        <p:txBody>
-          <a:bodyPr wrap="square" rtlCol="0" anchor="ctr"/>
-          <a:lstStyle/>
-          <a:p>
-            <a:pPr algn="ctr"/>
-            <a:r>
-              <a:rPr lang="en-US" sz="2000" b="1" dirty="0">
-                <a:solidFill>
-                  <a:schemeClr val="tx2"/>
-                </a:solidFill>
-                <a:latin typeface="Calibri" pitchFamily="34" charset="0"/>
-                <a:ea typeface="Calibri" pitchFamily="34" charset="-122"/>
-                <a:cs typeface="Calibri" pitchFamily="34" charset="-120"/>
-              </a:rPr>
-              <a:t>Explore</a:t>
-            </a:r>
-            <a:endParaRPr lang="en-US" sz="2000" dirty="0">
-              <a:solidFill>
-                <a:schemeClr val="tx2"/>
-              </a:solidFill>
-            </a:endParaRPr>
-          </a:p>
-        </p:txBody>
-      </p:sp>
-      <p:sp>
-        <p:nvSpPr>
-          <p:cNvPr id="27" name="Text 5">
-            <a:extLst>
-              <a:ext uri="{FF2B5EF4-FFF2-40B4-BE49-F238E27FC236}">
-                <a16:creationId xmlns:a16="http://schemas.microsoft.com/office/drawing/2014/main" id="{DD22C5A2-1B3B-80AF-8FD4-F939593F60A4}"/>
-              </a:ext>
-            </a:extLst>
-          </p:cNvPr>
-          <p:cNvSpPr/>
-          <p:nvPr/>
-        </p:nvSpPr>
-        <p:spPr>
-          <a:xfrm>
-            <a:off x="4206240" y="1935059"/>
-            <a:ext cx="609600" cy="487680"/>
-          </a:xfrm>
-          <a:prstGeom prst="rect">
-            <a:avLst/>
-          </a:prstGeom>
-          <a:noFill/>
-          <a:ln/>
-        </p:spPr>
-        <p:txBody>
-          <a:bodyPr wrap="square" rtlCol="0" anchor="ctr"/>
-          <a:lstStyle/>
-          <a:p>
-            <a:pPr algn="ctr"/>
-            <a:r>
-              <a:rPr lang="en-US" sz="2400" dirty="0">
-                <a:solidFill>
-                  <a:schemeClr val="tx2"/>
-                </a:solidFill>
-                <a:latin typeface="Arial" pitchFamily="34" charset="0"/>
-                <a:ea typeface="Arial" pitchFamily="34" charset="-122"/>
-                <a:cs typeface="Arial" pitchFamily="34" charset="-120"/>
-              </a:rPr>
-              <a:t>→</a:t>
-            </a:r>
-            <a:endParaRPr lang="en-US" sz="2400" dirty="0">
-              <a:solidFill>
-                <a:schemeClr val="tx2"/>
-              </a:solidFill>
-            </a:endParaRPr>
-          </a:p>
-        </p:txBody>
-      </p:sp>
-      <p:sp>
-        <p:nvSpPr>
-          <p:cNvPr id="28" name="Shape 6">
-            <a:extLst>
-              <a:ext uri="{FF2B5EF4-FFF2-40B4-BE49-F238E27FC236}">
-                <a16:creationId xmlns:a16="http://schemas.microsoft.com/office/drawing/2014/main" id="{765854E8-DE4C-6245-76EA-C8FF46E889B3}"/>
-              </a:ext>
-            </a:extLst>
-          </p:cNvPr>
-          <p:cNvSpPr/>
-          <p:nvPr/>
-        </p:nvSpPr>
-        <p:spPr>
-          <a:xfrm>
-            <a:off x="5608320" y="1874099"/>
-            <a:ext cx="548640" cy="548640"/>
-          </a:xfrm>
-          <a:prstGeom prst="ellipse">
-            <a:avLst/>
-          </a:prstGeom>
-          <a:solidFill>
-            <a:srgbClr val="D4A843"/>
-          </a:solidFill>
-          <a:ln/>
-        </p:spPr>
-        <p:txBody>
-          <a:bodyPr/>
-          <a:lstStyle/>
-          <a:p>
-            <a:endParaRPr lang="en-US" sz="2400">
-              <a:solidFill>
-                <a:schemeClr val="tx2"/>
-              </a:solidFill>
-            </a:endParaRPr>
-          </a:p>
-        </p:txBody>
-      </p:sp>
-      <p:sp>
-        <p:nvSpPr>
-          <p:cNvPr id="29" name="Text 7">
-            <a:extLst>
-              <a:ext uri="{FF2B5EF4-FFF2-40B4-BE49-F238E27FC236}">
-                <a16:creationId xmlns:a16="http://schemas.microsoft.com/office/drawing/2014/main" id="{744FA751-A64F-6FF3-5319-E0A7899BD89C}"/>
-              </a:ext>
-            </a:extLst>
-          </p:cNvPr>
-          <p:cNvSpPr/>
-          <p:nvPr/>
-        </p:nvSpPr>
-        <p:spPr>
-          <a:xfrm>
-            <a:off x="5608320" y="1874099"/>
-            <a:ext cx="548640" cy="548640"/>
-          </a:xfrm>
-          <a:prstGeom prst="rect">
-            <a:avLst/>
-          </a:prstGeom>
-          <a:noFill/>
-          <a:ln/>
-        </p:spPr>
-        <p:txBody>
-          <a:bodyPr wrap="square" rtlCol="0" anchor="ctr"/>
-          <a:lstStyle/>
-          <a:p>
-            <a:pPr algn="ctr"/>
-            <a:r>
-              <a:rPr lang="en-US" sz="1867" b="1" dirty="0">
-                <a:solidFill>
-                  <a:schemeClr val="tx2"/>
-                </a:solidFill>
-                <a:latin typeface="Calibri" pitchFamily="34" charset="0"/>
-                <a:ea typeface="Calibri" pitchFamily="34" charset="-122"/>
-                <a:cs typeface="Calibri" pitchFamily="34" charset="-120"/>
-              </a:rPr>
-              <a:t>2</a:t>
-            </a:r>
-            <a:endParaRPr lang="en-US" sz="1867" dirty="0">
-              <a:solidFill>
-                <a:schemeClr val="tx2"/>
-              </a:solidFill>
-            </a:endParaRPr>
-          </a:p>
-        </p:txBody>
-      </p:sp>
-      <p:sp>
-        <p:nvSpPr>
-          <p:cNvPr id="30" name="Text 8">
-            <a:extLst>
-              <a:ext uri="{FF2B5EF4-FFF2-40B4-BE49-F238E27FC236}">
-                <a16:creationId xmlns:a16="http://schemas.microsoft.com/office/drawing/2014/main" id="{F6742D85-CB26-3CC9-10FF-7375E621253C}"/>
-              </a:ext>
-            </a:extLst>
-          </p:cNvPr>
-          <p:cNvSpPr/>
-          <p:nvPr/>
-        </p:nvSpPr>
-        <p:spPr>
-          <a:xfrm>
-            <a:off x="5120640" y="2544659"/>
-            <a:ext cx="1524000" cy="426720"/>
-          </a:xfrm>
-          <a:prstGeom prst="rect">
-            <a:avLst/>
-          </a:prstGeom>
-          <a:noFill/>
-          <a:ln/>
-        </p:spPr>
-        <p:txBody>
-          <a:bodyPr wrap="square" rtlCol="0" anchor="ctr"/>
-          <a:lstStyle/>
-          <a:p>
-            <a:pPr algn="ctr"/>
-            <a:r>
-              <a:rPr lang="en-US" sz="2000" b="1" dirty="0">
-                <a:solidFill>
-                  <a:schemeClr val="tx2"/>
-                </a:solidFill>
-                <a:latin typeface="Calibri" pitchFamily="34" charset="0"/>
-                <a:ea typeface="Calibri" pitchFamily="34" charset="-122"/>
-                <a:cs typeface="Calibri" pitchFamily="34" charset="-120"/>
-              </a:rPr>
-              <a:t>Pin</a:t>
-            </a:r>
-            <a:endParaRPr lang="en-US" sz="2000" dirty="0">
-              <a:solidFill>
-                <a:schemeClr val="tx2"/>
-              </a:solidFill>
-            </a:endParaRPr>
-          </a:p>
-        </p:txBody>
-      </p:sp>
-      <p:sp>
-        <p:nvSpPr>
-          <p:cNvPr id="31" name="Text 9">
-            <a:extLst>
-              <a:ext uri="{FF2B5EF4-FFF2-40B4-BE49-F238E27FC236}">
-                <a16:creationId xmlns:a16="http://schemas.microsoft.com/office/drawing/2014/main" id="{C9934C1C-EA63-15BC-F2E3-75A848B70B44}"/>
-              </a:ext>
-            </a:extLst>
-          </p:cNvPr>
-          <p:cNvSpPr/>
-          <p:nvPr/>
-        </p:nvSpPr>
-        <p:spPr>
-          <a:xfrm>
-            <a:off x="6888480" y="1935059"/>
-            <a:ext cx="609600" cy="487680"/>
-          </a:xfrm>
-          <a:prstGeom prst="rect">
-            <a:avLst/>
-          </a:prstGeom>
-          <a:noFill/>
-          <a:ln/>
-        </p:spPr>
-        <p:txBody>
-          <a:bodyPr wrap="square" rtlCol="0" anchor="ctr"/>
-          <a:lstStyle/>
-          <a:p>
-            <a:pPr algn="ctr"/>
-            <a:r>
-              <a:rPr lang="en-US" sz="2400" dirty="0">
-                <a:solidFill>
-                  <a:schemeClr val="tx2"/>
-                </a:solidFill>
-                <a:latin typeface="Arial" pitchFamily="34" charset="0"/>
-                <a:ea typeface="Arial" pitchFamily="34" charset="-122"/>
-                <a:cs typeface="Arial" pitchFamily="34" charset="-120"/>
-              </a:rPr>
-              <a:t>→</a:t>
-            </a:r>
-            <a:endParaRPr lang="en-US" sz="2400" dirty="0">
-              <a:solidFill>
-                <a:schemeClr val="tx2"/>
-              </a:solidFill>
-            </a:endParaRPr>
-          </a:p>
-        </p:txBody>
-      </p:sp>
-      <p:sp>
-        <p:nvSpPr>
-          <p:cNvPr id="32" name="Shape 10">
-            <a:extLst>
-              <a:ext uri="{FF2B5EF4-FFF2-40B4-BE49-F238E27FC236}">
-                <a16:creationId xmlns:a16="http://schemas.microsoft.com/office/drawing/2014/main" id="{11916E26-9826-A04B-5488-9E8AF98A11C0}"/>
-              </a:ext>
-            </a:extLst>
-          </p:cNvPr>
-          <p:cNvSpPr/>
-          <p:nvPr/>
-        </p:nvSpPr>
-        <p:spPr>
-          <a:xfrm>
-            <a:off x="8290560" y="1874099"/>
-            <a:ext cx="548640" cy="548640"/>
-          </a:xfrm>
-          <a:prstGeom prst="ellipse">
-            <a:avLst/>
-          </a:prstGeom>
-          <a:solidFill>
-            <a:srgbClr val="D4A843"/>
-          </a:solidFill>
-          <a:ln/>
-        </p:spPr>
-        <p:txBody>
-          <a:bodyPr/>
-          <a:lstStyle/>
-          <a:p>
-            <a:endParaRPr lang="en-US" sz="2400">
-              <a:solidFill>
-                <a:schemeClr val="tx2"/>
-              </a:solidFill>
-            </a:endParaRPr>
-          </a:p>
-        </p:txBody>
-      </p:sp>
-      <p:sp>
-        <p:nvSpPr>
-          <p:cNvPr id="33" name="Text 11">
-            <a:extLst>
-              <a:ext uri="{FF2B5EF4-FFF2-40B4-BE49-F238E27FC236}">
-                <a16:creationId xmlns:a16="http://schemas.microsoft.com/office/drawing/2014/main" id="{7F2E6793-2B49-BD88-3507-B1D4E9D10304}"/>
-              </a:ext>
-            </a:extLst>
-          </p:cNvPr>
-          <p:cNvSpPr/>
-          <p:nvPr/>
-        </p:nvSpPr>
-        <p:spPr>
-          <a:xfrm>
-            <a:off x="8290560" y="1874099"/>
-            <a:ext cx="548640" cy="548640"/>
-          </a:xfrm>
-          <a:prstGeom prst="rect">
-            <a:avLst/>
-          </a:prstGeom>
-          <a:noFill/>
-          <a:ln/>
-        </p:spPr>
-        <p:txBody>
-          <a:bodyPr wrap="square" rtlCol="0" anchor="ctr"/>
-          <a:lstStyle/>
-          <a:p>
-            <a:pPr algn="ctr"/>
-            <a:r>
-              <a:rPr lang="en-US" sz="1867" b="1" dirty="0">
-                <a:solidFill>
-                  <a:schemeClr val="tx2"/>
-                </a:solidFill>
-                <a:latin typeface="Calibri" pitchFamily="34" charset="0"/>
-                <a:ea typeface="Calibri" pitchFamily="34" charset="-122"/>
-                <a:cs typeface="Calibri" pitchFamily="34" charset="-120"/>
-              </a:rPr>
-              <a:t>3</a:t>
-            </a:r>
-            <a:endParaRPr lang="en-US" sz="1867" dirty="0">
-              <a:solidFill>
-                <a:schemeClr val="tx2"/>
-              </a:solidFill>
-            </a:endParaRPr>
-          </a:p>
-        </p:txBody>
-      </p:sp>
-      <p:sp>
-        <p:nvSpPr>
-          <p:cNvPr id="34" name="Text 12">
-            <a:extLst>
-              <a:ext uri="{FF2B5EF4-FFF2-40B4-BE49-F238E27FC236}">
-                <a16:creationId xmlns:a16="http://schemas.microsoft.com/office/drawing/2014/main" id="{0EB0F96E-7741-4723-4717-20128FC05A6E}"/>
-              </a:ext>
-            </a:extLst>
-          </p:cNvPr>
-          <p:cNvSpPr/>
-          <p:nvPr/>
-        </p:nvSpPr>
-        <p:spPr>
-          <a:xfrm>
-            <a:off x="7802880" y="2544659"/>
-            <a:ext cx="1524000" cy="426720"/>
-          </a:xfrm>
-          <a:prstGeom prst="rect">
-            <a:avLst/>
-          </a:prstGeom>
-          <a:noFill/>
-          <a:ln/>
-        </p:spPr>
-        <p:txBody>
-          <a:bodyPr wrap="square" rtlCol="0" anchor="ctr"/>
-          <a:lstStyle/>
-          <a:p>
-            <a:pPr algn="ctr"/>
-            <a:r>
-              <a:rPr lang="en-US" sz="2000" b="1" dirty="0">
-                <a:solidFill>
-                  <a:schemeClr val="tx2"/>
-                </a:solidFill>
-                <a:latin typeface="Calibri" pitchFamily="34" charset="0"/>
-                <a:ea typeface="Calibri" pitchFamily="34" charset="-122"/>
-                <a:cs typeface="Calibri" pitchFamily="34" charset="-120"/>
-              </a:rPr>
-              <a:t>Present</a:t>
-            </a:r>
-            <a:endParaRPr lang="en-US" sz="2000" dirty="0">
-              <a:solidFill>
-                <a:schemeClr val="tx2"/>
-              </a:solidFill>
-            </a:endParaRPr>
-          </a:p>
-        </p:txBody>
-      </p:sp>
-      <p:sp>
-        <p:nvSpPr>
-          <p:cNvPr id="35" name="Text 13">
-            <a:extLst>
-              <a:ext uri="{FF2B5EF4-FFF2-40B4-BE49-F238E27FC236}">
-                <a16:creationId xmlns:a16="http://schemas.microsoft.com/office/drawing/2014/main" id="{CADF97B2-9244-6923-D52B-4DE3BB72424C}"/>
-              </a:ext>
-            </a:extLst>
-          </p:cNvPr>
-          <p:cNvSpPr/>
-          <p:nvPr/>
-        </p:nvSpPr>
-        <p:spPr>
-          <a:xfrm>
-            <a:off x="1219200" y="3173274"/>
-            <a:ext cx="9753600" cy="487680"/>
-          </a:xfrm>
-          <a:prstGeom prst="rect">
-            <a:avLst/>
-          </a:prstGeom>
-          <a:noFill/>
-          <a:ln/>
-        </p:spPr>
-        <p:txBody>
-          <a:bodyPr wrap="square" rtlCol="0" anchor="ctr"/>
-          <a:lstStyle/>
-          <a:p>
-            <a:pPr algn="ctr"/>
-            <a:r>
-              <a:rPr lang="en-US" sz="1600" dirty="0">
-                <a:solidFill>
-                  <a:srgbClr val="5A6078"/>
-                </a:solidFill>
-                <a:latin typeface="Calibri" pitchFamily="34" charset="0"/>
-                <a:ea typeface="Calibri" pitchFamily="34" charset="-122"/>
-                <a:cs typeface="Calibri" pitchFamily="34" charset="-120"/>
-              </a:rPr>
-              <a:t>Browse the data  ·  Save key findings  ·  Build your story</a:t>
-            </a:r>
-            <a:endParaRPr lang="en-US" sz="1600" dirty="0"/>
-          </a:p>
-        </p:txBody>
-      </p:sp>
-      <p:sp>
-        <p:nvSpPr>
-          <p:cNvPr id="38" name="Text 1">
-            <a:extLst>
-              <a:ext uri="{FF2B5EF4-FFF2-40B4-BE49-F238E27FC236}">
-                <a16:creationId xmlns:a16="http://schemas.microsoft.com/office/drawing/2014/main" id="{365E8963-2D87-FCCF-0A82-4FE70351544A}"/>
-              </a:ext>
-            </a:extLst>
-          </p:cNvPr>
-          <p:cNvSpPr/>
-          <p:nvPr/>
-        </p:nvSpPr>
-        <p:spPr>
-          <a:xfrm>
-            <a:off x="731520" y="426720"/>
-            <a:ext cx="2438400" cy="341376"/>
-          </a:xfrm>
-          <a:prstGeom prst="rect">
-            <a:avLst/>
-          </a:prstGeom>
-          <a:solidFill>
-            <a:srgbClr val="002060"/>
-          </a:solidFill>
-          <a:ln/>
-        </p:spPr>
-        <p:txBody>
-          <a:bodyPr wrap="square" rtlCol="0" anchor="ctr"/>
-          <a:lstStyle/>
-          <a:p>
-            <a:pPr algn="ctr"/>
-            <a:r>
-              <a:rPr lang="en-US" sz="1067" b="1" kern="0" spc="400" dirty="0">
-                <a:solidFill>
-                  <a:srgbClr val="D4A843"/>
-                </a:solidFill>
-                <a:latin typeface="Calibri" pitchFamily="34" charset="0"/>
-                <a:cs typeface="Calibri" pitchFamily="34" charset="-120"/>
-              </a:rPr>
-              <a:t>SEE IT IN ACTION</a:t>
-            </a:r>
-            <a:endParaRPr lang="en-US" sz="1067" dirty="0"/>
-          </a:p>
-        </p:txBody>
-      </p:sp>
-      <p:sp>
-        <p:nvSpPr>
-          <p:cNvPr id="39" name="Btn">
-            <a:extLst>
-              <a:ext uri="{FF2B5EF4-FFF2-40B4-BE49-F238E27FC236}">
-                <a16:creationId xmlns:a16="http://schemas.microsoft.com/office/drawing/2014/main" id="{4D702A27-698E-8C14-D22C-B4ECDCFBBC33}"/>
-              </a:ext>
-            </a:extLst>
-          </p:cNvPr>
-          <p:cNvSpPr/>
-          <p:nvPr/>
-        </p:nvSpPr>
-        <p:spPr>
-          <a:xfrm>
-            <a:off x="4318000" y="4406433"/>
-            <a:ext cx="3556000" cy="635000"/>
-          </a:xfrm>
-          <a:prstGeom prst="roundRect">
-            <a:avLst>
-              <a:gd name="adj" fmla="val 50000"/>
-            </a:avLst>
-          </a:prstGeom>
-          <a:solidFill>
-            <a:srgbClr val="CC9900"/>
-          </a:solidFill>
-          <a:ln>
-            <a:noFill/>
-          </a:ln>
-        </p:spPr>
-        <p:txBody>
-          <a:bodyPr wrap="square" lIns="91440" tIns="0" rIns="91440" bIns="0" anchor="ctr"/>
-          <a:lstStyle/>
-          <a:p>
-            <a:pPr algn="ctr"/>
-            <a:r>
-              <a:rPr lang="en-GB" sz="1800" b="1" dirty="0">
-                <a:solidFill>
-                  <a:srgbClr val="FFFFFF"/>
-                </a:solidFill>
-                <a:latin typeface="Raleway"/>
-              </a:rPr>
-              <a:t>Let's look at a live report</a:t>
-            </a:r>
+            <a:endParaRPr lang="en-US" sz="2400" dirty="0"/>
           </a:p>
         </p:txBody>
       </p:sp>
     </p:spTree>
     <p:extLst>
       <p:ext uri="{BB962C8B-B14F-4D97-AF65-F5344CB8AC3E}">
-        <p14:creationId xmlns:p14="http://schemas.microsoft.com/office/powerpoint/2010/main" val="4292749882"/>
+        <p14:creationId xmlns:p14="http://schemas.microsoft.com/office/powerpoint/2010/main" val="3379530151"/>
       </p:ext>
     </p:extLst>
   </p:cSld>
@@ -6728,7 +7180,7 @@
           <a:bodyPr/>
           <a:lstStyle/>
           <a:p>
-            <a:endParaRPr lang="en-US" sz="2400"/>
+            <a:endParaRPr lang="en-US" sz="2400" dirty="0"/>
           </a:p>
         </p:txBody>
       </p:sp>
@@ -6835,7 +7287,7 @@
                 <a:ea typeface="Calibri" pitchFamily="34" charset="-122"/>
                 <a:cs typeface="Calibri" pitchFamily="34" charset="-120"/>
               </a:rPr>
-              <a:t>All modules deliver into a single interactive report. Multiple modules can be combined per project.</a:t>
+              <a:t>We select and configure the right modules for your project and deliver them in a single interactive report</a:t>
             </a:r>
             <a:endParaRPr lang="en-US" sz="1333" dirty="0"/>
           </a:p>
@@ -6907,7 +7359,7 @@
           <a:bodyPr/>
           <a:lstStyle/>
           <a:p>
-            <a:endParaRPr lang="en-US" sz="2400"/>
+            <a:endParaRPr lang="en-US" sz="2400" dirty="0"/>
           </a:p>
         </p:txBody>
       </p:sp>
@@ -6934,7 +7386,7 @@
           <a:bodyPr/>
           <a:lstStyle/>
           <a:p>
-            <a:endParaRPr lang="en-US" sz="2400"/>
+            <a:endParaRPr lang="en-US" sz="2400" dirty="0"/>
           </a:p>
         </p:txBody>
       </p:sp>
@@ -7064,7 +7516,7 @@
           <a:bodyPr/>
           <a:lstStyle/>
           <a:p>
-            <a:endParaRPr lang="en-US" sz="2400"/>
+            <a:endParaRPr lang="en-US" sz="2400" dirty="0"/>
           </a:p>
         </p:txBody>
       </p:sp>
@@ -7091,7 +7543,7 @@
           <a:bodyPr/>
           <a:lstStyle/>
           <a:p>
-            <a:endParaRPr lang="en-US" sz="2400"/>
+            <a:endParaRPr lang="en-US" sz="2400" dirty="0"/>
           </a:p>
         </p:txBody>
       </p:sp>
@@ -7221,7 +7673,7 @@
           <a:bodyPr/>
           <a:lstStyle/>
           <a:p>
-            <a:endParaRPr lang="en-US" sz="2400"/>
+            <a:endParaRPr lang="en-US" sz="2400" dirty="0"/>
           </a:p>
         </p:txBody>
       </p:sp>
@@ -7248,7 +7700,7 @@
           <a:bodyPr/>
           <a:lstStyle/>
           <a:p>
-            <a:endParaRPr lang="en-US" sz="2400"/>
+            <a:endParaRPr lang="en-US" sz="2400" dirty="0"/>
           </a:p>
         </p:txBody>
       </p:sp>
@@ -7378,7 +7830,7 @@
           <a:bodyPr/>
           <a:lstStyle/>
           <a:p>
-            <a:endParaRPr lang="en-US" sz="2400"/>
+            <a:endParaRPr lang="en-US" sz="2400" dirty="0"/>
           </a:p>
         </p:txBody>
       </p:sp>
@@ -7405,7 +7857,7 @@
           <a:bodyPr/>
           <a:lstStyle/>
           <a:p>
-            <a:endParaRPr lang="en-US" sz="2400"/>
+            <a:endParaRPr lang="en-US" sz="2400" dirty="0"/>
           </a:p>
         </p:txBody>
       </p:sp>
@@ -7571,7 +8023,7 @@
           <a:bodyPr/>
           <a:lstStyle/>
           <a:p>
-            <a:endParaRPr lang="en-US" sz="2400"/>
+            <a:endParaRPr lang="en-US" sz="2400" dirty="0"/>
           </a:p>
         </p:txBody>
       </p:sp>
@@ -7598,7 +8050,7 @@
           <a:bodyPr/>
           <a:lstStyle/>
           <a:p>
-            <a:endParaRPr lang="en-US" sz="2400"/>
+            <a:endParaRPr lang="en-US" sz="2400" dirty="0"/>
           </a:p>
         </p:txBody>
       </p:sp>
@@ -7728,7 +8180,7 @@
           <a:bodyPr/>
           <a:lstStyle/>
           <a:p>
-            <a:endParaRPr lang="en-US" sz="2400"/>
+            <a:endParaRPr lang="en-US" sz="2400" dirty="0"/>
           </a:p>
         </p:txBody>
       </p:sp>
@@ -7755,7 +8207,7 @@
           <a:bodyPr/>
           <a:lstStyle/>
           <a:p>
-            <a:endParaRPr lang="en-US" sz="2400"/>
+            <a:endParaRPr lang="en-US" sz="2400" dirty="0"/>
           </a:p>
         </p:txBody>
       </p:sp>
@@ -7885,7 +8337,7 @@
           <a:bodyPr/>
           <a:lstStyle/>
           <a:p>
-            <a:endParaRPr lang="en-US" sz="2400"/>
+            <a:endParaRPr lang="en-US" sz="2400" dirty="0"/>
           </a:p>
         </p:txBody>
       </p:sp>
@@ -7912,7 +8364,7 @@
           <a:bodyPr/>
           <a:lstStyle/>
           <a:p>
-            <a:endParaRPr lang="en-US" sz="2400"/>
+            <a:endParaRPr lang="en-US" sz="2400" dirty="0"/>
           </a:p>
         </p:txBody>
       </p:sp>
@@ -8078,7 +8530,7 @@
           <a:bodyPr/>
           <a:lstStyle/>
           <a:p>
-            <a:endParaRPr lang="en-US" sz="2400"/>
+            <a:endParaRPr lang="en-US" sz="2400" dirty="0"/>
           </a:p>
         </p:txBody>
       </p:sp>
@@ -8105,7 +8557,7 @@
           <a:bodyPr/>
           <a:lstStyle/>
           <a:p>
-            <a:endParaRPr lang="en-US" sz="2400"/>
+            <a:endParaRPr lang="en-US" sz="2400" dirty="0"/>
           </a:p>
         </p:txBody>
       </p:sp>
@@ -8235,7 +8687,7 @@
           <a:bodyPr/>
           <a:lstStyle/>
           <a:p>
-            <a:endParaRPr lang="en-US" sz="2400"/>
+            <a:endParaRPr lang="en-US" sz="2400" dirty="0"/>
           </a:p>
         </p:txBody>
       </p:sp>
@@ -8262,7 +8714,7 @@
           <a:bodyPr/>
           <a:lstStyle/>
           <a:p>
-            <a:endParaRPr lang="en-US" sz="2400"/>
+            <a:endParaRPr lang="en-US" sz="2400" dirty="0"/>
           </a:p>
         </p:txBody>
       </p:sp>
@@ -8392,7 +8844,7 @@
           <a:bodyPr/>
           <a:lstStyle/>
           <a:p>
-            <a:endParaRPr lang="en-US" sz="2400"/>
+            <a:endParaRPr lang="en-US" sz="2400" dirty="0"/>
           </a:p>
         </p:txBody>
       </p:sp>
@@ -8419,7 +8871,7 @@
           <a:bodyPr/>
           <a:lstStyle/>
           <a:p>
-            <a:endParaRPr lang="en-US" sz="2400"/>
+            <a:endParaRPr lang="en-US" sz="2400" dirty="0"/>
           </a:p>
         </p:txBody>
       </p:sp>
@@ -8542,7 +8994,7 @@
           <a:bodyPr/>
           <a:lstStyle/>
           <a:p>
-            <a:endParaRPr lang="en-US" sz="2400"/>
+            <a:endParaRPr lang="en-US" sz="2400" dirty="0"/>
           </a:p>
         </p:txBody>
       </p:sp>
@@ -8569,7 +9021,7 @@
           <a:bodyPr/>
           <a:lstStyle/>
           <a:p>
-            <a:endParaRPr lang="en-US" sz="2400"/>
+            <a:endParaRPr lang="en-US" sz="2400" dirty="0"/>
           </a:p>
         </p:txBody>
       </p:sp>
@@ -8621,7 +9073,7 @@
           <a:bodyPr/>
           <a:lstStyle/>
           <a:p>
-            <a:endParaRPr lang="en-US" sz="2400"/>
+            <a:endParaRPr lang="en-US" sz="2400" dirty="0"/>
           </a:p>
         </p:txBody>
       </p:sp>
@@ -8728,7 +9180,7 @@
           <a:bodyPr/>
           <a:lstStyle/>
           <a:p>
-            <a:endParaRPr lang="en-US" sz="2400"/>
+            <a:endParaRPr lang="en-US" sz="2400" dirty="0"/>
           </a:p>
         </p:txBody>
       </p:sp>
@@ -8755,7 +9207,7 @@
           <a:bodyPr/>
           <a:lstStyle/>
           <a:p>
-            <a:endParaRPr lang="en-US" sz="2400"/>
+            <a:endParaRPr lang="en-US" sz="2400" dirty="0"/>
           </a:p>
         </p:txBody>
       </p:sp>
@@ -8782,7 +9234,7 @@
           <a:bodyPr/>
           <a:lstStyle/>
           <a:p>
-            <a:endParaRPr lang="en-US" sz="2400"/>
+            <a:endParaRPr lang="en-US" sz="2400" dirty="0"/>
           </a:p>
         </p:txBody>
       </p:sp>
@@ -8930,7 +9382,7 @@
           <a:bodyPr/>
           <a:lstStyle/>
           <a:p>
-            <a:endParaRPr lang="en-US" sz="2400"/>
+            <a:endParaRPr lang="en-US" sz="2400" dirty="0"/>
           </a:p>
         </p:txBody>
       </p:sp>
@@ -8957,7 +9409,7 @@
           <a:bodyPr/>
           <a:lstStyle/>
           <a:p>
-            <a:endParaRPr lang="en-US" sz="2400"/>
+            <a:endParaRPr lang="en-US" sz="2400" dirty="0"/>
           </a:p>
         </p:txBody>
       </p:sp>
@@ -8984,7 +9436,7 @@
           <a:bodyPr/>
           <a:lstStyle/>
           <a:p>
-            <a:endParaRPr lang="en-US" sz="2400"/>
+            <a:endParaRPr lang="en-US" sz="2400" dirty="0"/>
           </a:p>
         </p:txBody>
       </p:sp>
@@ -9132,7 +9584,7 @@
           <a:bodyPr/>
           <a:lstStyle/>
           <a:p>
-            <a:endParaRPr lang="en-US" sz="2400"/>
+            <a:endParaRPr lang="en-US" sz="2400" dirty="0"/>
           </a:p>
         </p:txBody>
       </p:sp>
@@ -9159,7 +9611,7 @@
           <a:bodyPr/>
           <a:lstStyle/>
           <a:p>
-            <a:endParaRPr lang="en-US" sz="2400"/>
+            <a:endParaRPr lang="en-US" sz="2400" dirty="0"/>
           </a:p>
         </p:txBody>
       </p:sp>
@@ -9186,7 +9638,7 @@
           <a:bodyPr/>
           <a:lstStyle/>
           <a:p>
-            <a:endParaRPr lang="en-US" sz="2400"/>
+            <a:endParaRPr lang="en-US" sz="2400" dirty="0"/>
           </a:p>
         </p:txBody>
       </p:sp>
@@ -9327,7 +9779,7 @@
           <a:bodyPr/>
           <a:lstStyle/>
           <a:p>
-            <a:endParaRPr lang="en-US" sz="2400"/>
+            <a:endParaRPr lang="en-US" sz="2400" dirty="0"/>
           </a:p>
         </p:txBody>
       </p:sp>
@@ -9402,7 +9854,7 @@
           <a:bodyPr/>
           <a:lstStyle/>
           <a:p>
-            <a:endParaRPr lang="en-US" sz="2400"/>
+            <a:endParaRPr lang="en-US" sz="2400" dirty="0"/>
           </a:p>
         </p:txBody>
       </p:sp>
@@ -9429,7 +9881,7 @@
           <a:bodyPr/>
           <a:lstStyle/>
           <a:p>
-            <a:endParaRPr lang="en-US" sz="2400"/>
+            <a:endParaRPr lang="en-US" sz="2400" dirty="0"/>
           </a:p>
         </p:txBody>
       </p:sp>

--- a/docs/marketing/Turas demo companion.pptx
+++ b/docs/marketing/Turas demo companion.pptx
@@ -9346,9 +9346,27 @@
                 <a:ea typeface="Calibri" pitchFamily="34" charset="-122"/>
                 <a:cs typeface="Calibri" pitchFamily="34" charset="-120"/>
               </a:rPr>
-              <a:t>Send us an existing dataset — even an old one — and we’ll run it through Turas so you can see your data in an interactive report.</a:t>
-            </a:r>
-            <a:endParaRPr lang="en-US" sz="1467" dirty="0"/>
+              <a:t>Send us an existing dataset — even an old one — and we’ll run it through Turas so you can see your data in an interactive report. </a:t>
+            </a:r>
+          </a:p>
+          <a:p>
+            <a:pPr>
+              <a:lnSpc>
+                <a:spcPct val="130000"/>
+              </a:lnSpc>
+            </a:pPr>
+            <a:r>
+              <a:rPr lang="en-US" sz="1100" dirty="0">
+                <a:solidFill>
+                  <a:srgbClr val="5A6078"/>
+                </a:solidFill>
+                <a:latin typeface="Calibri" pitchFamily="34" charset="0"/>
+                <a:ea typeface="Calibri" pitchFamily="34" charset="-122"/>
+                <a:cs typeface="Calibri" pitchFamily="34" charset="-120"/>
+              </a:rPr>
+              <a:t>*subject to data in a usable format</a:t>
+            </a:r>
+            <a:endParaRPr lang="en-US" sz="1100" dirty="0"/>
           </a:p>
         </p:txBody>
       </p:sp>
@@ -9750,7 +9768,7 @@
                 <a:ea typeface="Calibri" pitchFamily="34" charset="-122"/>
                 <a:cs typeface="Calibri" pitchFamily="34" charset="-120"/>
               </a:rPr>
-              <a:t>We can set up a broader session for colleagues who need to see it. Or share the one-pager and let them come to us.</a:t>
+              <a:t>We can set up a broader session for colleagues who need to see it. </a:t>
             </a:r>
             <a:endParaRPr lang="en-US" sz="1467" dirty="0"/>
           </a:p>

--- a/docs/marketing/Turas demo companion.pptx
+++ b/docs/marketing/Turas demo companion.pptx
@@ -6583,7 +6583,7 @@
                 </a:solidFill>
                 <a:latin typeface="Calibri" pitchFamily="34" charset="0"/>
               </a:rPr>
-              <a:t>Send</a:t>
+              <a:t>Receive</a:t>
             </a:r>
           </a:p>
         </p:txBody>

--- a/docs/marketing/Turas demo companion.pptx
+++ b/docs/marketing/Turas demo companion.pptx
@@ -5630,8 +5630,8 @@
         </p:nvSpPr>
         <p:spPr>
           <a:xfrm>
-            <a:off x="6644640" y="2596896"/>
-            <a:ext cx="4511040" cy="914400"/>
+            <a:off x="6644640" y="2554366"/>
+            <a:ext cx="4511040" cy="1054608"/>
           </a:xfrm>
           <a:prstGeom prst="rect">
             <a:avLst/>
@@ -5657,7 +5657,7 @@
                 <a:ea typeface="Calibri" pitchFamily="34" charset="-122"/>
                 <a:cs typeface="Calibri" pitchFamily="34" charset="-120"/>
               </a:rPr>
-              <a:t>You send us the data. We handle all preparation, analysis and delivery on our own systems. No third-party platform touches your data. The delivered report is immutable.</a:t>
+              <a:t>You send us the data. We handle all preparation, analysis and delivery on our own systems. Your data is not processed by a third-party analytical platform.. The delivered report is immutable.</a:t>
             </a:r>
             <a:endParaRPr lang="en-US" sz="1400" dirty="0"/>
           </a:p>
